--- a/Agentic_Cybersecurity_Prompt_Injection_Firewall.pptx
+++ b/Agentic_Cybersecurity_Prompt_Injection_Firewall.pptx
@@ -18,20 +18,21 @@
     <p:sldId id="273" r:id="rId12"/>
     <p:sldId id="263" r:id="rId13"/>
     <p:sldId id="278" r:id="rId14"/>
-    <p:sldId id="286" r:id="rId15"/>
-    <p:sldId id="279" r:id="rId16"/>
-    <p:sldId id="288" r:id="rId17"/>
-    <p:sldId id="280" r:id="rId18"/>
-    <p:sldId id="289" r:id="rId19"/>
-    <p:sldId id="281" r:id="rId20"/>
-    <p:sldId id="290" r:id="rId21"/>
-    <p:sldId id="264" r:id="rId22"/>
-    <p:sldId id="265" r:id="rId23"/>
-    <p:sldId id="266" r:id="rId24"/>
-    <p:sldId id="274" r:id="rId25"/>
-    <p:sldId id="275" r:id="rId26"/>
-    <p:sldId id="276" r:id="rId27"/>
-    <p:sldId id="277" r:id="rId28"/>
+    <p:sldId id="291" r:id="rId15"/>
+    <p:sldId id="286" r:id="rId16"/>
+    <p:sldId id="279" r:id="rId17"/>
+    <p:sldId id="288" r:id="rId18"/>
+    <p:sldId id="280" r:id="rId19"/>
+    <p:sldId id="289" r:id="rId20"/>
+    <p:sldId id="281" r:id="rId21"/>
+    <p:sldId id="290" r:id="rId22"/>
+    <p:sldId id="264" r:id="rId23"/>
+    <p:sldId id="265" r:id="rId24"/>
+    <p:sldId id="266" r:id="rId25"/>
+    <p:sldId id="274" r:id="rId26"/>
+    <p:sldId id="275" r:id="rId27"/>
+    <p:sldId id="276" r:id="rId28"/>
+    <p:sldId id="277" r:id="rId29"/>
   </p:sldIdLst>
   <p:sldSz cx="12192000" cy="6858000"/>
   <p:notesSz cx="6858000" cy="9144000"/>
@@ -153,7 +154,7 @@
 <p1510:revInfo xmlns:a="http://schemas.openxmlformats.org/drawingml/2006/main" xmlns:r="http://schemas.openxmlformats.org/officeDocument/2006/relationships" xmlns:p1510="http://schemas.microsoft.com/office/powerpoint/2015/10/main">
   <p1510:revLst>
     <p1510:client id="{00000000-0000-0000-0000-000000000000}" v="125" dt="2026-10-02T12:23:06.464"/>
-    <p1510:client id="{87B404D8-6BDD-A2B6-9262-04AED46FA824}" v="1674" dt="2026-10-04T11:16:51.242"/>
+    <p1510:client id="{87B404D8-6BDD-A2B6-9262-04AED46FA824}" v="1680" dt="2026-10-04T12:16:40.175"/>
   </p1510:revLst>
 </p1510:revInfo>
 </file>
@@ -10155,7 +10156,7 @@
       </p:grpSpPr>
       <p:sp useBgFill="1">
         <p:nvSpPr>
-          <p:cNvPr id="7" name="Rectangle 6">
+          <p:cNvPr id="18" name="Rectangle 17">
             <a:extLst>
               <a:ext uri="{FF2B5EF4-FFF2-40B4-BE49-F238E27FC236}">
                 <a16:creationId xmlns:a16="http://schemas.microsoft.com/office/drawing/2014/main" id="{AB8C311F-7253-4AED-9701-7FC0708C41C7}"/>
@@ -10231,7 +10232,7 @@
       </p:sp>
       <p:sp>
         <p:nvSpPr>
-          <p:cNvPr id="9" name="Rectangle 8">
+          <p:cNvPr id="20" name="Rectangle 19">
             <a:extLst>
               <a:ext uri="{FF2B5EF4-FFF2-40B4-BE49-F238E27FC236}">
                 <a16:creationId xmlns:a16="http://schemas.microsoft.com/office/drawing/2014/main" id="{E2384209-CB15-4CDF-9D31-C44FD9A3F20D}"/>
@@ -10304,7 +10305,7 @@
       </p:sp>
       <p:sp>
         <p:nvSpPr>
-          <p:cNvPr id="11" name="Rectangle 10">
+          <p:cNvPr id="22" name="Rectangle 21">
             <a:extLst>
               <a:ext uri="{FF2B5EF4-FFF2-40B4-BE49-F238E27FC236}">
                 <a16:creationId xmlns:a16="http://schemas.microsoft.com/office/drawing/2014/main" id="{2633B3B5-CC90-43F0-8714-D31D1F3F0209}"/>
@@ -10377,7 +10378,7 @@
       </p:sp>
       <p:sp>
         <p:nvSpPr>
-          <p:cNvPr id="13" name="Rectangle 12">
+          <p:cNvPr id="24" name="Rectangle 23">
             <a:extLst>
               <a:ext uri="{FF2B5EF4-FFF2-40B4-BE49-F238E27FC236}">
                 <a16:creationId xmlns:a16="http://schemas.microsoft.com/office/drawing/2014/main" id="{A8D57A06-A426-446D-B02C-A2DC6B62E45E}"/>
@@ -10454,10 +10455,10 @@
       </p:sp>
       <p:pic>
         <p:nvPicPr>
-          <p:cNvPr id="2" name="Picture 1">
+          <p:cNvPr id="3" name="Picture 2" descr="A screenshot of a computer&#10;&#10;AI-generated content may be incorrect.">
             <a:extLst>
               <a:ext uri="{FF2B5EF4-FFF2-40B4-BE49-F238E27FC236}">
-                <a16:creationId xmlns:a16="http://schemas.microsoft.com/office/drawing/2014/main" id="{F530B609-2320-8ACE-5A37-0523BAC89714}"/>
+                <a16:creationId xmlns:a16="http://schemas.microsoft.com/office/drawing/2014/main" id="{3C1B368D-0445-8172-8126-0363A327B02C}"/>
               </a:ext>
             </a:extLst>
           </p:cNvPr>
@@ -10468,7 +10469,7 @@
         </p:nvPicPr>
         <p:blipFill>
           <a:blip r:embed="rId2"/>
-          <a:srcRect b="2852"/>
+          <a:srcRect t="931" b="6201"/>
           <a:stretch>
             <a:fillRect/>
           </a:stretch>
@@ -10535,6 +10536,386 @@
       </p:grpSpPr>
       <p:sp useBgFill="1">
         <p:nvSpPr>
+          <p:cNvPr id="7" name="Rectangle 6">
+            <a:extLst>
+              <a:ext uri="{FF2B5EF4-FFF2-40B4-BE49-F238E27FC236}">
+                <a16:creationId xmlns:a16="http://schemas.microsoft.com/office/drawing/2014/main" id="{AB8C311F-7253-4AED-9701-7FC0708C41C7}"/>
+              </a:ext>
+              <a:ext uri="{C183D7F6-B498-43B3-948B-1728B52AA6E4}">
+                <adec:decorative xmlns:adec="http://schemas.microsoft.com/office/drawing/2017/decorative" val="1"/>
+              </a:ext>
+            </a:extLst>
+          </p:cNvPr>
+          <p:cNvSpPr>
+            <a:spLocks noGrp="1" noRot="1" noChangeAspect="1" noMove="1" noResize="1" noEditPoints="1" noAdjustHandles="1" noChangeArrowheads="1" noChangeShapeType="1" noTextEdit="1"/>
+          </p:cNvSpPr>
+          <p:nvPr>
+            <p:extLst>
+              <p:ext uri="{386F3935-93C4-4BCD-93E2-E3B085C9AB24}">
+                <p16:designElem xmlns:p16="http://schemas.microsoft.com/office/powerpoint/2015/main" val="1"/>
+              </p:ext>
+            </p:extLst>
+          </p:nvPr>
+        </p:nvSpPr>
+        <p:spPr>
+          <a:xfrm>
+            <a:off x="0" y="0"/>
+            <a:ext cx="12192000" cy="6858000"/>
+          </a:xfrm>
+          <a:prstGeom prst="rect">
+            <a:avLst/>
+          </a:prstGeom>
+          <a:ln w="12700" cap="flat" cmpd="sng" algn="ctr">
+            <a:noFill/>
+            <a:prstDash val="solid"/>
+            <a:miter lim="800000"/>
+          </a:ln>
+          <a:effectLst/>
+          <a:extLst>
+            <a:ext uri="{91240B29-F687-4F45-9708-019B960494DF}">
+              <a14:hiddenLine xmlns:a14="http://schemas.microsoft.com/office/drawing/2010/main" w="12700" cap="flat" cmpd="sng" algn="ctr">
+                <a:solidFill>
+                  <a:schemeClr val="accent1">
+                    <a:shade val="50000"/>
+                  </a:schemeClr>
+                </a:solidFill>
+                <a:prstDash val="solid"/>
+                <a:miter lim="800000"/>
+              </a14:hiddenLine>
+            </a:ext>
+          </a:extLst>
+        </p:spPr>
+        <p:style>
+          <a:lnRef idx="2">
+            <a:schemeClr val="accent1">
+              <a:shade val="50000"/>
+            </a:schemeClr>
+          </a:lnRef>
+          <a:fillRef idx="1">
+            <a:schemeClr val="accent1"/>
+          </a:fillRef>
+          <a:effectRef idx="0">
+            <a:schemeClr val="accent1"/>
+          </a:effectRef>
+          <a:fontRef idx="minor">
+            <a:schemeClr val="lt1"/>
+          </a:fontRef>
+        </p:style>
+        <p:txBody>
+          <a:bodyPr rtlCol="0" anchor="ctr"/>
+          <a:lstStyle/>
+          <a:p>
+            <a:pPr algn="ctr"/>
+            <a:endParaRPr lang="en-US"/>
+          </a:p>
+        </p:txBody>
+      </p:sp>
+      <p:sp>
+        <p:nvSpPr>
+          <p:cNvPr id="9" name="Rectangle 8">
+            <a:extLst>
+              <a:ext uri="{FF2B5EF4-FFF2-40B4-BE49-F238E27FC236}">
+                <a16:creationId xmlns:a16="http://schemas.microsoft.com/office/drawing/2014/main" id="{E2384209-CB15-4CDF-9D31-C44FD9A3F20D}"/>
+              </a:ext>
+              <a:ext uri="{C183D7F6-B498-43B3-948B-1728B52AA6E4}">
+                <adec:decorative xmlns:adec="http://schemas.microsoft.com/office/drawing/2017/decorative" val="1"/>
+              </a:ext>
+            </a:extLst>
+          </p:cNvPr>
+          <p:cNvSpPr>
+            <a:spLocks noGrp="1" noRot="1" noChangeAspect="1" noMove="1" noResize="1" noEditPoints="1" noAdjustHandles="1" noChangeArrowheads="1" noChangeShapeType="1" noTextEdit="1"/>
+          </p:cNvSpPr>
+          <p:nvPr>
+            <p:extLst>
+              <p:ext uri="{386F3935-93C4-4BCD-93E2-E3B085C9AB24}">
+                <p16:designElem xmlns:p16="http://schemas.microsoft.com/office/powerpoint/2015/main" val="1"/>
+              </p:ext>
+            </p:extLst>
+          </p:nvPr>
+        </p:nvSpPr>
+        <p:spPr>
+          <a:xfrm rot="16200000" flipH="1">
+            <a:off x="2666617" y="-2666188"/>
+            <a:ext cx="6858000" cy="12191233"/>
+          </a:xfrm>
+          <a:prstGeom prst="rect">
+            <a:avLst/>
+          </a:prstGeom>
+          <a:gradFill>
+            <a:gsLst>
+              <a:gs pos="8000">
+                <a:schemeClr val="accent1"/>
+              </a:gs>
+              <a:gs pos="100000">
+                <a:schemeClr val="accent1">
+                  <a:lumMod val="50000"/>
+                </a:schemeClr>
+              </a:gs>
+            </a:gsLst>
+            <a:lin ang="12000000" scaled="0"/>
+          </a:gradFill>
+          <a:ln>
+            <a:noFill/>
+          </a:ln>
+        </p:spPr>
+        <p:style>
+          <a:lnRef idx="2">
+            <a:schemeClr val="accent1">
+              <a:shade val="50000"/>
+            </a:schemeClr>
+          </a:lnRef>
+          <a:fillRef idx="1">
+            <a:schemeClr val="accent1"/>
+          </a:fillRef>
+          <a:effectRef idx="0">
+            <a:schemeClr val="accent1"/>
+          </a:effectRef>
+          <a:fontRef idx="minor">
+            <a:schemeClr val="lt1"/>
+          </a:fontRef>
+        </p:style>
+        <p:txBody>
+          <a:bodyPr rtlCol="0" anchor="ctr"/>
+          <a:lstStyle/>
+          <a:p>
+            <a:pPr algn="ctr"/>
+            <a:endParaRPr lang="en-US"/>
+          </a:p>
+        </p:txBody>
+      </p:sp>
+      <p:sp>
+        <p:nvSpPr>
+          <p:cNvPr id="11" name="Rectangle 10">
+            <a:extLst>
+              <a:ext uri="{FF2B5EF4-FFF2-40B4-BE49-F238E27FC236}">
+                <a16:creationId xmlns:a16="http://schemas.microsoft.com/office/drawing/2014/main" id="{2633B3B5-CC90-43F0-8714-D31D1F3F0209}"/>
+              </a:ext>
+              <a:ext uri="{C183D7F6-B498-43B3-948B-1728B52AA6E4}">
+                <adec:decorative xmlns:adec="http://schemas.microsoft.com/office/drawing/2017/decorative" val="1"/>
+              </a:ext>
+            </a:extLst>
+          </p:cNvPr>
+          <p:cNvSpPr>
+            <a:spLocks noGrp="1" noRot="1" noChangeAspect="1" noMove="1" noResize="1" noEditPoints="1" noAdjustHandles="1" noChangeArrowheads="1" noChangeShapeType="1" noTextEdit="1"/>
+          </p:cNvSpPr>
+          <p:nvPr>
+            <p:extLst>
+              <p:ext uri="{386F3935-93C4-4BCD-93E2-E3B085C9AB24}">
+                <p16:designElem xmlns:p16="http://schemas.microsoft.com/office/powerpoint/2015/main" val="1"/>
+              </p:ext>
+            </p:extLst>
+          </p:nvPr>
+        </p:nvSpPr>
+        <p:spPr>
+          <a:xfrm rot="10800000" flipH="1">
+            <a:off x="-2311" y="0"/>
+            <a:ext cx="9070846" cy="6857572"/>
+          </a:xfrm>
+          <a:prstGeom prst="rect">
+            <a:avLst/>
+          </a:prstGeom>
+          <a:gradFill>
+            <a:gsLst>
+              <a:gs pos="8000">
+                <a:srgbClr val="000000">
+                  <a:alpha val="52000"/>
+                </a:srgbClr>
+              </a:gs>
+              <a:gs pos="100000">
+                <a:schemeClr val="accent1"/>
+              </a:gs>
+            </a:gsLst>
+            <a:lin ang="4800000" scaled="0"/>
+          </a:gradFill>
+          <a:ln>
+            <a:noFill/>
+          </a:ln>
+        </p:spPr>
+        <p:style>
+          <a:lnRef idx="2">
+            <a:schemeClr val="accent1">
+              <a:shade val="50000"/>
+            </a:schemeClr>
+          </a:lnRef>
+          <a:fillRef idx="1">
+            <a:schemeClr val="accent1"/>
+          </a:fillRef>
+          <a:effectRef idx="0">
+            <a:schemeClr val="accent1"/>
+          </a:effectRef>
+          <a:fontRef idx="minor">
+            <a:schemeClr val="lt1"/>
+          </a:fontRef>
+        </p:style>
+        <p:txBody>
+          <a:bodyPr rtlCol="0" anchor="ctr"/>
+          <a:lstStyle/>
+          <a:p>
+            <a:pPr algn="ctr"/>
+            <a:endParaRPr lang="en-US"/>
+          </a:p>
+        </p:txBody>
+      </p:sp>
+      <p:sp>
+        <p:nvSpPr>
+          <p:cNvPr id="13" name="Rectangle 12">
+            <a:extLst>
+              <a:ext uri="{FF2B5EF4-FFF2-40B4-BE49-F238E27FC236}">
+                <a16:creationId xmlns:a16="http://schemas.microsoft.com/office/drawing/2014/main" id="{A8D57A06-A426-446D-B02C-A2DC6B62E45E}"/>
+              </a:ext>
+              <a:ext uri="{C183D7F6-B498-43B3-948B-1728B52AA6E4}">
+                <adec:decorative xmlns:adec="http://schemas.microsoft.com/office/drawing/2017/decorative" val="1"/>
+              </a:ext>
+            </a:extLst>
+          </p:cNvPr>
+          <p:cNvSpPr>
+            <a:spLocks noGrp="1" noRot="1" noChangeAspect="1" noMove="1" noResize="1" noEditPoints="1" noAdjustHandles="1" noChangeArrowheads="1" noChangeShapeType="1" noTextEdit="1"/>
+          </p:cNvSpPr>
+          <p:nvPr>
+            <p:extLst>
+              <p:ext uri="{386F3935-93C4-4BCD-93E2-E3B085C9AB24}">
+                <p16:designElem xmlns:p16="http://schemas.microsoft.com/office/powerpoint/2015/main" val="1"/>
+              </p:ext>
+            </p:extLst>
+          </p:nvPr>
+        </p:nvSpPr>
+        <p:spPr>
+          <a:xfrm rot="16200000" flipH="1">
+            <a:off x="3649491" y="-1685840"/>
+            <a:ext cx="4894564" cy="12193546"/>
+          </a:xfrm>
+          <a:prstGeom prst="rect">
+            <a:avLst/>
+          </a:prstGeom>
+          <a:gradFill>
+            <a:gsLst>
+              <a:gs pos="0">
+                <a:schemeClr val="accent5">
+                  <a:lumMod val="60000"/>
+                  <a:lumOff val="40000"/>
+                  <a:alpha val="0"/>
+                </a:schemeClr>
+              </a:gs>
+              <a:gs pos="100000">
+                <a:srgbClr val="000000">
+                  <a:alpha val="46000"/>
+                </a:srgbClr>
+              </a:gs>
+            </a:gsLst>
+            <a:lin ang="1200000" scaled="0"/>
+          </a:gradFill>
+          <a:ln>
+            <a:noFill/>
+          </a:ln>
+        </p:spPr>
+        <p:style>
+          <a:lnRef idx="2">
+            <a:schemeClr val="accent1">
+              <a:shade val="50000"/>
+            </a:schemeClr>
+          </a:lnRef>
+          <a:fillRef idx="1">
+            <a:schemeClr val="accent1"/>
+          </a:fillRef>
+          <a:effectRef idx="0">
+            <a:schemeClr val="accent1"/>
+          </a:effectRef>
+          <a:fontRef idx="minor">
+            <a:schemeClr val="lt1"/>
+          </a:fontRef>
+        </p:style>
+        <p:txBody>
+          <a:bodyPr rtlCol="0" anchor="ctr"/>
+          <a:lstStyle/>
+          <a:p>
+            <a:pPr algn="ctr"/>
+            <a:endParaRPr lang="en-US"/>
+          </a:p>
+        </p:txBody>
+      </p:sp>
+      <p:pic>
+        <p:nvPicPr>
+          <p:cNvPr id="2" name="Picture 1" descr="A screenshot of a computer&#10;&#10;AI-generated content may be incorrect.">
+            <a:extLst>
+              <a:ext uri="{FF2B5EF4-FFF2-40B4-BE49-F238E27FC236}">
+                <a16:creationId xmlns:a16="http://schemas.microsoft.com/office/drawing/2014/main" id="{2EDDA9CF-59C2-91AB-B7C0-D68B357D9711}"/>
+              </a:ext>
+            </a:extLst>
+          </p:cNvPr>
+          <p:cNvPicPr>
+            <a:picLocks noChangeAspect="1"/>
+          </p:cNvPicPr>
+          <p:nvPr/>
+        </p:nvPicPr>
+        <p:blipFill>
+          <a:blip r:embed="rId2"/>
+          <a:srcRect b="6721"/>
+          <a:stretch>
+            <a:fillRect/>
+          </a:stretch>
+        </p:blipFill>
+        <p:spPr>
+          <a:xfrm>
+            <a:off x="457200" y="457200"/>
+            <a:ext cx="11277600" cy="5943600"/>
+          </a:xfrm>
+          <a:prstGeom prst="rect">
+            <a:avLst/>
+          </a:prstGeom>
+        </p:spPr>
+      </p:pic>
+    </p:spTree>
+    <p:extLst>
+      <p:ext uri="{BB962C8B-B14F-4D97-AF65-F5344CB8AC3E}">
+        <p14:creationId xmlns:p14="http://schemas.microsoft.com/office/powerpoint/2010/main" val="179088061"/>
+      </p:ext>
+    </p:extLst>
+  </p:cSld>
+  <p:clrMapOvr>
+    <a:masterClrMapping/>
+  </p:clrMapOvr>
+  <mc:AlternateContent xmlns:mc="http://schemas.openxmlformats.org/markup-compatibility/2006" xmlns:p14="http://schemas.microsoft.com/office/powerpoint/2010/main">
+    <mc:Choice Requires="p14">
+      <p:transition spd="med" p14:dur="700">
+        <p:fade/>
+      </p:transition>
+    </mc:Choice>
+    <mc:Fallback xmlns="">
+      <p:transition spd="med">
+        <p:fade/>
+      </p:transition>
+    </mc:Fallback>
+  </mc:AlternateContent>
+</p:sld>
+</file>
+
+<file path=ppt/slides/slide15.xml><?xml version="1.0" encoding="utf-8"?>
+<p:sld xmlns:a="http://schemas.openxmlformats.org/drawingml/2006/main" xmlns:r="http://schemas.openxmlformats.org/officeDocument/2006/relationships" xmlns:p="http://schemas.openxmlformats.org/presentationml/2006/main">
+  <p:cSld>
+    <p:bg>
+      <p:bgPr>
+        <a:solidFill>
+          <a:schemeClr val="bg1"/>
+        </a:solidFill>
+        <a:effectLst/>
+      </p:bgPr>
+    </p:bg>
+    <p:spTree>
+      <p:nvGrpSpPr>
+        <p:cNvPr id="1" name=""/>
+        <p:cNvGrpSpPr/>
+        <p:nvPr/>
+      </p:nvGrpSpPr>
+      <p:grpSpPr>
+        <a:xfrm>
+          <a:off x="0" y="0"/>
+          <a:ext cx="0" cy="0"/>
+          <a:chOff x="0" y="0"/>
+          <a:chExt cx="0" cy="0"/>
+        </a:xfrm>
+      </p:grpSpPr>
+      <p:sp useBgFill="1">
+        <p:nvSpPr>
           <p:cNvPr id="8" name="Rectangle 7">
             <a:extLst>
               <a:ext uri="{FF2B5EF4-FFF2-40B4-BE49-F238E27FC236}">
@@ -11311,7 +11692,7 @@
 </p:sld>
 </file>
 
-<file path=ppt/slides/slide15.xml><?xml version="1.0" encoding="utf-8"?>
+<file path=ppt/slides/slide16.xml><?xml version="1.0" encoding="utf-8"?>
 <p:sld xmlns:a="http://schemas.openxmlformats.org/drawingml/2006/main" xmlns:r="http://schemas.openxmlformats.org/officeDocument/2006/relationships" xmlns:p="http://schemas.openxmlformats.org/presentationml/2006/main">
   <p:cSld>
     <p:spTree>
@@ -11383,7 +11764,7 @@
 </p:sld>
 </file>
 
-<file path=ppt/slides/slide16.xml><?xml version="1.0" encoding="utf-8"?>
+<file path=ppt/slides/slide17.xml><?xml version="1.0" encoding="utf-8"?>
 <p:sld xmlns:a="http://schemas.openxmlformats.org/drawingml/2006/main" xmlns:r="http://schemas.openxmlformats.org/officeDocument/2006/relationships" xmlns:p="http://schemas.openxmlformats.org/presentationml/2006/main">
   <p:cSld>
     <p:bg>
@@ -12278,7 +12659,7 @@
 </p:sld>
 </file>
 
-<file path=ppt/slides/slide17.xml><?xml version="1.0" encoding="utf-8"?>
+<file path=ppt/slides/slide18.xml><?xml version="1.0" encoding="utf-8"?>
 <p:sld xmlns:a="http://schemas.openxmlformats.org/drawingml/2006/main" xmlns:r="http://schemas.openxmlformats.org/officeDocument/2006/relationships" xmlns:p="http://schemas.openxmlformats.org/presentationml/2006/main">
   <p:cSld>
     <p:spTree>
@@ -12350,7 +12731,7 @@
 </p:sld>
 </file>
 
-<file path=ppt/slides/slide18.xml><?xml version="1.0" encoding="utf-8"?>
+<file path=ppt/slides/slide19.xml><?xml version="1.0" encoding="utf-8"?>
 <p:sld xmlns:a="http://schemas.openxmlformats.org/drawingml/2006/main" xmlns:r="http://schemas.openxmlformats.org/officeDocument/2006/relationships" xmlns:p="http://schemas.openxmlformats.org/presentationml/2006/main">
   <p:cSld>
     <p:bg>
@@ -13226,78 +13607,6 @@
 </p:sld>
 </file>
 
-<file path=ppt/slides/slide19.xml><?xml version="1.0" encoding="utf-8"?>
-<p:sld xmlns:a="http://schemas.openxmlformats.org/drawingml/2006/main" xmlns:r="http://schemas.openxmlformats.org/officeDocument/2006/relationships" xmlns:p="http://schemas.openxmlformats.org/presentationml/2006/main">
-  <p:cSld>
-    <p:spTree>
-      <p:nvGrpSpPr>
-        <p:cNvPr id="1" name=""/>
-        <p:cNvGrpSpPr/>
-        <p:nvPr/>
-      </p:nvGrpSpPr>
-      <p:grpSpPr>
-        <a:xfrm>
-          <a:off x="0" y="0"/>
-          <a:ext cx="0" cy="0"/>
-          <a:chOff x="0" y="0"/>
-          <a:chExt cx="0" cy="0"/>
-        </a:xfrm>
-      </p:grpSpPr>
-      <p:pic>
-        <p:nvPicPr>
-          <p:cNvPr id="2" name="Picture 1">
-            <a:extLst>
-              <a:ext uri="{FF2B5EF4-FFF2-40B4-BE49-F238E27FC236}">
-                <a16:creationId xmlns:a16="http://schemas.microsoft.com/office/drawing/2014/main" id="{9B1D3B1B-E5CC-98E6-F7BB-D0B4F7354110}"/>
-              </a:ext>
-            </a:extLst>
-          </p:cNvPr>
-          <p:cNvPicPr>
-            <a:picLocks noChangeAspect="1"/>
-          </p:cNvPicPr>
-          <p:nvPr/>
-        </p:nvPicPr>
-        <p:blipFill>
-          <a:blip r:embed="rId2"/>
-          <a:stretch>
-            <a:fillRect/>
-          </a:stretch>
-        </p:blipFill>
-        <p:spPr>
-          <a:xfrm>
-            <a:off x="0" y="119648"/>
-            <a:ext cx="12192000" cy="6618705"/>
-          </a:xfrm>
-          <a:prstGeom prst="rect">
-            <a:avLst/>
-          </a:prstGeom>
-        </p:spPr>
-      </p:pic>
-    </p:spTree>
-    <p:extLst>
-      <p:ext uri="{BB962C8B-B14F-4D97-AF65-F5344CB8AC3E}">
-        <p14:creationId xmlns:p14="http://schemas.microsoft.com/office/powerpoint/2010/main" val="3682221775"/>
-      </p:ext>
-    </p:extLst>
-  </p:cSld>
-  <p:clrMapOvr>
-    <a:masterClrMapping/>
-  </p:clrMapOvr>
-  <mc:AlternateContent xmlns:mc="http://schemas.openxmlformats.org/markup-compatibility/2006" xmlns:p14="http://schemas.microsoft.com/office/powerpoint/2010/main">
-    <mc:Choice Requires="p14">
-      <p:transition spd="med" p14:dur="700">
-        <p:fade/>
-      </p:transition>
-    </mc:Choice>
-    <mc:Fallback xmlns="">
-      <p:transition spd="med">
-        <p:fade/>
-      </p:transition>
-    </mc:Fallback>
-  </mc:AlternateContent>
-</p:sld>
-</file>
-
 <file path=ppt/slides/slide2.xml><?xml version="1.0" encoding="utf-8"?>
 <p:sld xmlns:a="http://schemas.openxmlformats.org/drawingml/2006/main" xmlns:r="http://schemas.openxmlformats.org/officeDocument/2006/relationships" xmlns:p="http://schemas.openxmlformats.org/presentationml/2006/main">
   <p:cSld>
@@ -14137,6 +14446,78 @@
 <file path=ppt/slides/slide20.xml><?xml version="1.0" encoding="utf-8"?>
 <p:sld xmlns:a="http://schemas.openxmlformats.org/drawingml/2006/main" xmlns:r="http://schemas.openxmlformats.org/officeDocument/2006/relationships" xmlns:p="http://schemas.openxmlformats.org/presentationml/2006/main">
   <p:cSld>
+    <p:spTree>
+      <p:nvGrpSpPr>
+        <p:cNvPr id="1" name=""/>
+        <p:cNvGrpSpPr/>
+        <p:nvPr/>
+      </p:nvGrpSpPr>
+      <p:grpSpPr>
+        <a:xfrm>
+          <a:off x="0" y="0"/>
+          <a:ext cx="0" cy="0"/>
+          <a:chOff x="0" y="0"/>
+          <a:chExt cx="0" cy="0"/>
+        </a:xfrm>
+      </p:grpSpPr>
+      <p:pic>
+        <p:nvPicPr>
+          <p:cNvPr id="2" name="Picture 1">
+            <a:extLst>
+              <a:ext uri="{FF2B5EF4-FFF2-40B4-BE49-F238E27FC236}">
+                <a16:creationId xmlns:a16="http://schemas.microsoft.com/office/drawing/2014/main" id="{9B1D3B1B-E5CC-98E6-F7BB-D0B4F7354110}"/>
+              </a:ext>
+            </a:extLst>
+          </p:cNvPr>
+          <p:cNvPicPr>
+            <a:picLocks noChangeAspect="1"/>
+          </p:cNvPicPr>
+          <p:nvPr/>
+        </p:nvPicPr>
+        <p:blipFill>
+          <a:blip r:embed="rId2"/>
+          <a:stretch>
+            <a:fillRect/>
+          </a:stretch>
+        </p:blipFill>
+        <p:spPr>
+          <a:xfrm>
+            <a:off x="0" y="119648"/>
+            <a:ext cx="12192000" cy="6618705"/>
+          </a:xfrm>
+          <a:prstGeom prst="rect">
+            <a:avLst/>
+          </a:prstGeom>
+        </p:spPr>
+      </p:pic>
+    </p:spTree>
+    <p:extLst>
+      <p:ext uri="{BB962C8B-B14F-4D97-AF65-F5344CB8AC3E}">
+        <p14:creationId xmlns:p14="http://schemas.microsoft.com/office/powerpoint/2010/main" val="3682221775"/>
+      </p:ext>
+    </p:extLst>
+  </p:cSld>
+  <p:clrMapOvr>
+    <a:masterClrMapping/>
+  </p:clrMapOvr>
+  <mc:AlternateContent xmlns:mc="http://schemas.openxmlformats.org/markup-compatibility/2006" xmlns:p14="http://schemas.microsoft.com/office/powerpoint/2010/main">
+    <mc:Choice Requires="p14">
+      <p:transition spd="med" p14:dur="700">
+        <p:fade/>
+      </p:transition>
+    </mc:Choice>
+    <mc:Fallback xmlns="">
+      <p:transition spd="med">
+        <p:fade/>
+      </p:transition>
+    </mc:Fallback>
+  </mc:AlternateContent>
+</p:sld>
+</file>
+
+<file path=ppt/slides/slide21.xml><?xml version="1.0" encoding="utf-8"?>
+<p:sld xmlns:a="http://schemas.openxmlformats.org/drawingml/2006/main" xmlns:r="http://schemas.openxmlformats.org/officeDocument/2006/relationships" xmlns:p="http://schemas.openxmlformats.org/presentationml/2006/main">
+  <p:cSld>
     <p:bg>
       <p:bgPr>
         <a:solidFill>
@@ -14940,7 +15321,7 @@
 </p:sld>
 </file>
 
-<file path=ppt/slides/slide21.xml><?xml version="1.0" encoding="utf-8"?>
+<file path=ppt/slides/slide22.xml><?xml version="1.0" encoding="utf-8"?>
 <p:sld xmlns:a="http://schemas.openxmlformats.org/drawingml/2006/main" xmlns:r="http://schemas.openxmlformats.org/officeDocument/2006/relationships" xmlns:p="http://schemas.openxmlformats.org/presentationml/2006/main">
   <p:cSld>
     <p:bg>
@@ -15606,7 +15987,7 @@
 </p:sld>
 </file>
 
-<file path=ppt/slides/slide22.xml><?xml version="1.0" encoding="utf-8"?>
+<file path=ppt/slides/slide23.xml><?xml version="1.0" encoding="utf-8"?>
 <p:sld xmlns:a="http://schemas.openxmlformats.org/drawingml/2006/main" xmlns:r="http://schemas.openxmlformats.org/officeDocument/2006/relationships" xmlns:p="http://schemas.openxmlformats.org/presentationml/2006/main">
   <p:cSld>
     <p:bg>
@@ -16369,7 +16750,7 @@
 </p:sld>
 </file>
 
-<file path=ppt/slides/slide23.xml><?xml version="1.0" encoding="utf-8"?>
+<file path=ppt/slides/slide24.xml><?xml version="1.0" encoding="utf-8"?>
 <p:sld xmlns:a="http://schemas.openxmlformats.org/drawingml/2006/main" xmlns:r="http://schemas.openxmlformats.org/officeDocument/2006/relationships" xmlns:p="http://schemas.openxmlformats.org/presentationml/2006/main">
   <p:cSld>
     <p:bg>
@@ -17137,7 +17518,7 @@
 </p:sld>
 </file>
 
-<file path=ppt/slides/slide24.xml><?xml version="1.0" encoding="utf-8"?>
+<file path=ppt/slides/slide25.xml><?xml version="1.0" encoding="utf-8"?>
 <p:sld xmlns:a="http://schemas.openxmlformats.org/drawingml/2006/main" xmlns:r="http://schemas.openxmlformats.org/officeDocument/2006/relationships" xmlns:p="http://schemas.openxmlformats.org/presentationml/2006/main">
   <p:cSld>
     <p:bg>
@@ -17996,7 +18377,7 @@
 </p:sld>
 </file>
 
-<file path=ppt/slides/slide25.xml><?xml version="1.0" encoding="utf-8"?>
+<file path=ppt/slides/slide26.xml><?xml version="1.0" encoding="utf-8"?>
 <p:sld xmlns:a="http://schemas.openxmlformats.org/drawingml/2006/main" xmlns:r="http://schemas.openxmlformats.org/officeDocument/2006/relationships" xmlns:p="http://schemas.openxmlformats.org/presentationml/2006/main">
   <p:cSld>
     <p:bg>
@@ -18909,7 +19290,7 @@
 </p:sld>
 </file>
 
-<file path=ppt/slides/slide26.xml><?xml version="1.0" encoding="utf-8"?>
+<file path=ppt/slides/slide27.xml><?xml version="1.0" encoding="utf-8"?>
 <p:sld xmlns:a="http://schemas.openxmlformats.org/drawingml/2006/main" xmlns:r="http://schemas.openxmlformats.org/officeDocument/2006/relationships" xmlns:p="http://schemas.openxmlformats.org/presentationml/2006/main">
   <p:cSld>
     <p:bg>
@@ -20045,7 +20426,7 @@
 </p:sld>
 </file>
 
-<file path=ppt/slides/slide27.xml><?xml version="1.0" encoding="utf-8"?>
+<file path=ppt/slides/slide28.xml><?xml version="1.0" encoding="utf-8"?>
 <p:sld xmlns:a="http://schemas.openxmlformats.org/drawingml/2006/main" xmlns:r="http://schemas.openxmlformats.org/officeDocument/2006/relationships" xmlns:p="http://schemas.openxmlformats.org/presentationml/2006/main">
   <p:cSld>
     <p:bg>
